--- a/slides/manual.pptx
+++ b/slides/manual.pptx
@@ -12152,7 +12152,7 @@
           <a:p>
             <a:fld id="{740993C0-9AB3-4209-9AF9-896CEF8BC588}" type="datetimeFigureOut">
               <a:rPr lang="en-US" smtClean="0"/>
-              <a:t>1/21/2025</a:t>
+              <a:t>10/14/2026</a:t>
             </a:fld>
             <a:endParaRPr lang="en-US"/>
           </a:p>
@@ -12322,7 +12322,7 @@
           <a:p>
             <a:fld id="{740993C0-9AB3-4209-9AF9-896CEF8BC588}" type="datetimeFigureOut">
               <a:rPr lang="en-US" smtClean="0"/>
-              <a:t>1/21/2025</a:t>
+              <a:t>10/14/2026</a:t>
             </a:fld>
             <a:endParaRPr lang="en-US"/>
           </a:p>
@@ -12568,7 +12568,7 @@
           <a:p>
             <a:fld id="{740993C0-9AB3-4209-9AF9-896CEF8BC588}" type="datetimeFigureOut">
               <a:rPr lang="en-US" smtClean="0"/>
-              <a:t>1/21/2025</a:t>
+              <a:t>10/14/2026</a:t>
             </a:fld>
             <a:endParaRPr lang="en-US"/>
           </a:p>
@@ -12800,7 +12800,7 @@
           <a:p>
             <a:fld id="{740993C0-9AB3-4209-9AF9-896CEF8BC588}" type="datetimeFigureOut">
               <a:rPr lang="en-US" smtClean="0"/>
-              <a:t>1/21/2025</a:t>
+              <a:t>10/14/2026</a:t>
             </a:fld>
             <a:endParaRPr lang="en-US"/>
           </a:p>
@@ -13167,7 +13167,7 @@
           <a:p>
             <a:fld id="{740993C0-9AB3-4209-9AF9-896CEF8BC588}" type="datetimeFigureOut">
               <a:rPr lang="en-US" smtClean="0"/>
-              <a:t>1/21/2025</a:t>
+              <a:t>10/14/2026</a:t>
             </a:fld>
             <a:endParaRPr lang="en-US"/>
           </a:p>
@@ -13285,7 +13285,7 @@
           <a:p>
             <a:fld id="{740993C0-9AB3-4209-9AF9-896CEF8BC588}" type="datetimeFigureOut">
               <a:rPr lang="en-US" smtClean="0"/>
-              <a:t>1/21/2025</a:t>
+              <a:t>10/14/2026</a:t>
             </a:fld>
             <a:endParaRPr lang="en-US"/>
           </a:p>
@@ -13380,7 +13380,7 @@
           <a:p>
             <a:fld id="{740993C0-9AB3-4209-9AF9-896CEF8BC588}" type="datetimeFigureOut">
               <a:rPr lang="en-US" smtClean="0"/>
-              <a:t>1/21/2025</a:t>
+              <a:t>10/14/2026</a:t>
             </a:fld>
             <a:endParaRPr lang="en-US"/>
           </a:p>
@@ -13933,7 +13933,7 @@
           <a:p>
             <a:fld id="{740993C0-9AB3-4209-9AF9-896CEF8BC588}" type="datetimeFigureOut">
               <a:rPr lang="en-US" smtClean="0"/>
-              <a:t>1/21/2025</a:t>
+              <a:t>10/14/2026</a:t>
             </a:fld>
             <a:endParaRPr lang="en-US"/>
           </a:p>
@@ -14190,7 +14190,7 @@
           <a:p>
             <a:fld id="{740993C0-9AB3-4209-9AF9-896CEF8BC588}" type="datetimeFigureOut">
               <a:rPr lang="en-US" smtClean="0"/>
-              <a:t>1/21/2025</a:t>
+              <a:t>10/14/2026</a:t>
             </a:fld>
             <a:endParaRPr lang="en-US"/>
           </a:p>
@@ -14360,7 +14360,7 @@
           <a:p>
             <a:fld id="{740993C0-9AB3-4209-9AF9-896CEF8BC588}" type="datetimeFigureOut">
               <a:rPr lang="en-US" smtClean="0"/>
-              <a:t>1/21/2025</a:t>
+              <a:t>10/14/2026</a:t>
             </a:fld>
             <a:endParaRPr lang="en-US"/>
           </a:p>
@@ -14540,7 +14540,7 @@
           <a:p>
             <a:fld id="{740993C0-9AB3-4209-9AF9-896CEF8BC588}" type="datetimeFigureOut">
               <a:rPr lang="en-US" smtClean="0"/>
-              <a:t>1/21/2025</a:t>
+              <a:t>10/14/2026</a:t>
             </a:fld>
             <a:endParaRPr lang="en-US"/>
           </a:p>
@@ -17436,7 +17436,7 @@
           <a:p>
             <a:fld id="{740993C0-9AB3-4209-9AF9-896CEF8BC588}" type="datetimeFigureOut">
               <a:rPr lang="en-US" smtClean="0"/>
-              <a:t>1/21/2025</a:t>
+              <a:t>10/14/2026</a:t>
             </a:fld>
             <a:endParaRPr lang="en-US"/>
           </a:p>
@@ -19002,73 +19002,73 @@
           <a:custGeom>
             <a:avLst/>
             <a:gdLst>
-              <a:gd name="connsiteX0" fmla="*/ 0 w 3474720"/>
-              <a:gd name="connsiteY0" fmla="*/ 0 h 18288"/>
-              <a:gd name="connsiteX1" fmla="*/ 694944 w 3474720"/>
-              <a:gd name="connsiteY1" fmla="*/ 0 h 18288"/>
-              <a:gd name="connsiteX2" fmla="*/ 1355141 w 3474720"/>
-              <a:gd name="connsiteY2" fmla="*/ 0 h 18288"/>
-              <a:gd name="connsiteX3" fmla="*/ 2015338 w 3474720"/>
-              <a:gd name="connsiteY3" fmla="*/ 0 h 18288"/>
-              <a:gd name="connsiteX4" fmla="*/ 2779776 w 3474720"/>
-              <a:gd name="connsiteY4" fmla="*/ 0 h 18288"/>
-              <a:gd name="connsiteX5" fmla="*/ 3474720 w 3474720"/>
-              <a:gd name="connsiteY5" fmla="*/ 0 h 18288"/>
-              <a:gd name="connsiteX6" fmla="*/ 3474720 w 3474720"/>
-              <a:gd name="connsiteY6" fmla="*/ 18288 h 18288"/>
-              <a:gd name="connsiteX7" fmla="*/ 2779776 w 3474720"/>
-              <a:gd name="connsiteY7" fmla="*/ 18288 h 18288"/>
-              <a:gd name="connsiteX8" fmla="*/ 2189074 w 3474720"/>
-              <a:gd name="connsiteY8" fmla="*/ 18288 h 18288"/>
-              <a:gd name="connsiteX9" fmla="*/ 1528877 w 3474720"/>
-              <a:gd name="connsiteY9" fmla="*/ 18288 h 18288"/>
-              <a:gd name="connsiteX10" fmla="*/ 868680 w 3474720"/>
-              <a:gd name="connsiteY10" fmla="*/ 18288 h 18288"/>
-              <a:gd name="connsiteX11" fmla="*/ 0 w 3474720"/>
-              <a:gd name="connsiteY11" fmla="*/ 18288 h 18288"/>
-              <a:gd name="connsiteX12" fmla="*/ 0 w 3474720"/>
-              <a:gd name="connsiteY12" fmla="*/ 0 h 18288"/>
+              <a:gd name="csX0" fmla="*/ 0 w 3474720"/>
+              <a:gd name="csY0" fmla="*/ 0 h 18288"/>
+              <a:gd name="csX1" fmla="*/ 694944 w 3474720"/>
+              <a:gd name="csY1" fmla="*/ 0 h 18288"/>
+              <a:gd name="csX2" fmla="*/ 1355141 w 3474720"/>
+              <a:gd name="csY2" fmla="*/ 0 h 18288"/>
+              <a:gd name="csX3" fmla="*/ 2015338 w 3474720"/>
+              <a:gd name="csY3" fmla="*/ 0 h 18288"/>
+              <a:gd name="csX4" fmla="*/ 2779776 w 3474720"/>
+              <a:gd name="csY4" fmla="*/ 0 h 18288"/>
+              <a:gd name="csX5" fmla="*/ 3474720 w 3474720"/>
+              <a:gd name="csY5" fmla="*/ 0 h 18288"/>
+              <a:gd name="csX6" fmla="*/ 3474720 w 3474720"/>
+              <a:gd name="csY6" fmla="*/ 18288 h 18288"/>
+              <a:gd name="csX7" fmla="*/ 2779776 w 3474720"/>
+              <a:gd name="csY7" fmla="*/ 18288 h 18288"/>
+              <a:gd name="csX8" fmla="*/ 2189074 w 3474720"/>
+              <a:gd name="csY8" fmla="*/ 18288 h 18288"/>
+              <a:gd name="csX9" fmla="*/ 1528877 w 3474720"/>
+              <a:gd name="csY9" fmla="*/ 18288 h 18288"/>
+              <a:gd name="csX10" fmla="*/ 868680 w 3474720"/>
+              <a:gd name="csY10" fmla="*/ 18288 h 18288"/>
+              <a:gd name="csX11" fmla="*/ 0 w 3474720"/>
+              <a:gd name="csY11" fmla="*/ 18288 h 18288"/>
+              <a:gd name="csX12" fmla="*/ 0 w 3474720"/>
+              <a:gd name="csY12" fmla="*/ 0 h 18288"/>
             </a:gdLst>
             <a:ahLst/>
             <a:cxnLst>
               <a:cxn ang="0">
-                <a:pos x="connsiteX0" y="connsiteY0"/>
+                <a:pos x="csX0" y="csY0"/>
               </a:cxn>
               <a:cxn ang="0">
-                <a:pos x="connsiteX1" y="connsiteY1"/>
+                <a:pos x="csX1" y="csY1"/>
               </a:cxn>
               <a:cxn ang="0">
-                <a:pos x="connsiteX2" y="connsiteY2"/>
+                <a:pos x="csX2" y="csY2"/>
               </a:cxn>
               <a:cxn ang="0">
-                <a:pos x="connsiteX3" y="connsiteY3"/>
+                <a:pos x="csX3" y="csY3"/>
               </a:cxn>
               <a:cxn ang="0">
-                <a:pos x="connsiteX4" y="connsiteY4"/>
+                <a:pos x="csX4" y="csY4"/>
               </a:cxn>
               <a:cxn ang="0">
-                <a:pos x="connsiteX5" y="connsiteY5"/>
+                <a:pos x="csX5" y="csY5"/>
               </a:cxn>
               <a:cxn ang="0">
-                <a:pos x="connsiteX6" y="connsiteY6"/>
+                <a:pos x="csX6" y="csY6"/>
               </a:cxn>
               <a:cxn ang="0">
-                <a:pos x="connsiteX7" y="connsiteY7"/>
+                <a:pos x="csX7" y="csY7"/>
               </a:cxn>
               <a:cxn ang="0">
-                <a:pos x="connsiteX8" y="connsiteY8"/>
+                <a:pos x="csX8" y="csY8"/>
               </a:cxn>
               <a:cxn ang="0">
-                <a:pos x="connsiteX9" y="connsiteY9"/>
+                <a:pos x="csX9" y="csY9"/>
               </a:cxn>
               <a:cxn ang="0">
-                <a:pos x="connsiteX10" y="connsiteY10"/>
+                <a:pos x="csX10" y="csY10"/>
               </a:cxn>
               <a:cxn ang="0">
-                <a:pos x="connsiteX11" y="connsiteY11"/>
+                <a:pos x="csX11" y="csY11"/>
               </a:cxn>
               <a:cxn ang="0">
-                <a:pos x="connsiteX12" y="connsiteY12"/>
+                <a:pos x="csX12" y="csY12"/>
               </a:cxn>
             </a:cxnLst>
             <a:rect l="l" t="t" r="r" b="b"/>
@@ -23717,93 +23717,93 @@
           <a:custGeom>
             <a:avLst/>
             <a:gdLst>
-              <a:gd name="connsiteX0" fmla="*/ 0 w 4243589"/>
-              <a:gd name="connsiteY0" fmla="*/ 0 h 18288"/>
-              <a:gd name="connsiteX1" fmla="*/ 478919 w 4243589"/>
-              <a:gd name="connsiteY1" fmla="*/ 0 h 18288"/>
-              <a:gd name="connsiteX2" fmla="*/ 957839 w 4243589"/>
-              <a:gd name="connsiteY2" fmla="*/ 0 h 18288"/>
-              <a:gd name="connsiteX3" fmla="*/ 1521630 w 4243589"/>
-              <a:gd name="connsiteY3" fmla="*/ 0 h 18288"/>
-              <a:gd name="connsiteX4" fmla="*/ 2212729 w 4243589"/>
-              <a:gd name="connsiteY4" fmla="*/ 0 h 18288"/>
-              <a:gd name="connsiteX5" fmla="*/ 2734084 w 4243589"/>
-              <a:gd name="connsiteY5" fmla="*/ 0 h 18288"/>
-              <a:gd name="connsiteX6" fmla="*/ 3255439 w 4243589"/>
-              <a:gd name="connsiteY6" fmla="*/ 0 h 18288"/>
-              <a:gd name="connsiteX7" fmla="*/ 4243589 w 4243589"/>
-              <a:gd name="connsiteY7" fmla="*/ 0 h 18288"/>
-              <a:gd name="connsiteX8" fmla="*/ 4243589 w 4243589"/>
-              <a:gd name="connsiteY8" fmla="*/ 18288 h 18288"/>
-              <a:gd name="connsiteX9" fmla="*/ 3594926 w 4243589"/>
-              <a:gd name="connsiteY9" fmla="*/ 18288 h 18288"/>
-              <a:gd name="connsiteX10" fmla="*/ 3073571 w 4243589"/>
-              <a:gd name="connsiteY10" fmla="*/ 18288 h 18288"/>
-              <a:gd name="connsiteX11" fmla="*/ 2552216 w 4243589"/>
-              <a:gd name="connsiteY11" fmla="*/ 18288 h 18288"/>
-              <a:gd name="connsiteX12" fmla="*/ 1903553 w 4243589"/>
-              <a:gd name="connsiteY12" fmla="*/ 18288 h 18288"/>
-              <a:gd name="connsiteX13" fmla="*/ 1212454 w 4243589"/>
-              <a:gd name="connsiteY13" fmla="*/ 18288 h 18288"/>
-              <a:gd name="connsiteX14" fmla="*/ 733535 w 4243589"/>
-              <a:gd name="connsiteY14" fmla="*/ 18288 h 18288"/>
-              <a:gd name="connsiteX15" fmla="*/ 0 w 4243589"/>
-              <a:gd name="connsiteY15" fmla="*/ 18288 h 18288"/>
-              <a:gd name="connsiteX16" fmla="*/ 0 w 4243589"/>
-              <a:gd name="connsiteY16" fmla="*/ 0 h 18288"/>
+              <a:gd name="csX0" fmla="*/ 0 w 4243589"/>
+              <a:gd name="csY0" fmla="*/ 0 h 18288"/>
+              <a:gd name="csX1" fmla="*/ 478919 w 4243589"/>
+              <a:gd name="csY1" fmla="*/ 0 h 18288"/>
+              <a:gd name="csX2" fmla="*/ 957839 w 4243589"/>
+              <a:gd name="csY2" fmla="*/ 0 h 18288"/>
+              <a:gd name="csX3" fmla="*/ 1521630 w 4243589"/>
+              <a:gd name="csY3" fmla="*/ 0 h 18288"/>
+              <a:gd name="csX4" fmla="*/ 2212729 w 4243589"/>
+              <a:gd name="csY4" fmla="*/ 0 h 18288"/>
+              <a:gd name="csX5" fmla="*/ 2734084 w 4243589"/>
+              <a:gd name="csY5" fmla="*/ 0 h 18288"/>
+              <a:gd name="csX6" fmla="*/ 3255439 w 4243589"/>
+              <a:gd name="csY6" fmla="*/ 0 h 18288"/>
+              <a:gd name="csX7" fmla="*/ 4243589 w 4243589"/>
+              <a:gd name="csY7" fmla="*/ 0 h 18288"/>
+              <a:gd name="csX8" fmla="*/ 4243589 w 4243589"/>
+              <a:gd name="csY8" fmla="*/ 18288 h 18288"/>
+              <a:gd name="csX9" fmla="*/ 3594926 w 4243589"/>
+              <a:gd name="csY9" fmla="*/ 18288 h 18288"/>
+              <a:gd name="csX10" fmla="*/ 3073571 w 4243589"/>
+              <a:gd name="csY10" fmla="*/ 18288 h 18288"/>
+              <a:gd name="csX11" fmla="*/ 2552216 w 4243589"/>
+              <a:gd name="csY11" fmla="*/ 18288 h 18288"/>
+              <a:gd name="csX12" fmla="*/ 1903553 w 4243589"/>
+              <a:gd name="csY12" fmla="*/ 18288 h 18288"/>
+              <a:gd name="csX13" fmla="*/ 1212454 w 4243589"/>
+              <a:gd name="csY13" fmla="*/ 18288 h 18288"/>
+              <a:gd name="csX14" fmla="*/ 733535 w 4243589"/>
+              <a:gd name="csY14" fmla="*/ 18288 h 18288"/>
+              <a:gd name="csX15" fmla="*/ 0 w 4243589"/>
+              <a:gd name="csY15" fmla="*/ 18288 h 18288"/>
+              <a:gd name="csX16" fmla="*/ 0 w 4243589"/>
+              <a:gd name="csY16" fmla="*/ 0 h 18288"/>
             </a:gdLst>
             <a:ahLst/>
             <a:cxnLst>
               <a:cxn ang="0">
-                <a:pos x="connsiteX0" y="connsiteY0"/>
+                <a:pos x="csX0" y="csY0"/>
               </a:cxn>
               <a:cxn ang="0">
-                <a:pos x="connsiteX1" y="connsiteY1"/>
+                <a:pos x="csX1" y="csY1"/>
               </a:cxn>
               <a:cxn ang="0">
-                <a:pos x="connsiteX2" y="connsiteY2"/>
+                <a:pos x="csX2" y="csY2"/>
               </a:cxn>
               <a:cxn ang="0">
-                <a:pos x="connsiteX3" y="connsiteY3"/>
+                <a:pos x="csX3" y="csY3"/>
               </a:cxn>
               <a:cxn ang="0">
-                <a:pos x="connsiteX4" y="connsiteY4"/>
+                <a:pos x="csX4" y="csY4"/>
               </a:cxn>
               <a:cxn ang="0">
-                <a:pos x="connsiteX5" y="connsiteY5"/>
+                <a:pos x="csX5" y="csY5"/>
               </a:cxn>
               <a:cxn ang="0">
-                <a:pos x="connsiteX6" y="connsiteY6"/>
+                <a:pos x="csX6" y="csY6"/>
               </a:cxn>
               <a:cxn ang="0">
-                <a:pos x="connsiteX7" y="connsiteY7"/>
+                <a:pos x="csX7" y="csY7"/>
               </a:cxn>
               <a:cxn ang="0">
-                <a:pos x="connsiteX8" y="connsiteY8"/>
+                <a:pos x="csX8" y="csY8"/>
               </a:cxn>
               <a:cxn ang="0">
-                <a:pos x="connsiteX9" y="connsiteY9"/>
+                <a:pos x="csX9" y="csY9"/>
               </a:cxn>
               <a:cxn ang="0">
-                <a:pos x="connsiteX10" y="connsiteY10"/>
+                <a:pos x="csX10" y="csY10"/>
               </a:cxn>
               <a:cxn ang="0">
-                <a:pos x="connsiteX11" y="connsiteY11"/>
+                <a:pos x="csX11" y="csY11"/>
               </a:cxn>
               <a:cxn ang="0">
-                <a:pos x="connsiteX12" y="connsiteY12"/>
+                <a:pos x="csX12" y="csY12"/>
               </a:cxn>
               <a:cxn ang="0">
-                <a:pos x="connsiteX13" y="connsiteY13"/>
+                <a:pos x="csX13" y="csY13"/>
               </a:cxn>
               <a:cxn ang="0">
-                <a:pos x="connsiteX14" y="connsiteY14"/>
+                <a:pos x="csX14" y="csY14"/>
               </a:cxn>
               <a:cxn ang="0">
-                <a:pos x="connsiteX15" y="connsiteY15"/>
+                <a:pos x="csX15" y="csY15"/>
               </a:cxn>
               <a:cxn ang="0">
-                <a:pos x="connsiteX16" y="connsiteY16"/>
+                <a:pos x="csX16" y="csY16"/>
               </a:cxn>
             </a:cxnLst>
             <a:rect l="l" t="t" r="r" b="b"/>
@@ -25616,7 +25616,23 @@
                   <a:schemeClr val="accent1"/>
                 </a:solidFill>
               </a:rPr>
-              <a:t>with open(“filename”, “r”, encoding=“utf-8-sig”) as </a:t>
+              <a:t>with open(“filename</a:t>
+            </a:r>
+            <a:r>
+              <a:rPr lang="en-US">
+                <a:solidFill>
+                  <a:schemeClr val="accent1"/>
+                </a:solidFill>
+              </a:rPr>
+              <a:t>”, “w”, </a:t>
+            </a:r>
+            <a:r>
+              <a:rPr lang="en-US" dirty="0">
+                <a:solidFill>
+                  <a:schemeClr val="accent1"/>
+                </a:solidFill>
+              </a:rPr>
+              <a:t>encoding=“utf-8-sig”) as </a:t>
             </a:r>
             <a:r>
               <a:rPr lang="en-US" dirty="0" err="1">
@@ -26685,7 +26701,7 @@
             </a:r>
             <a:r>
               <a:rPr lang="en-US" dirty="0"/>
-              <a:t> with the key I give you in class</a:t>
+              <a:t> with the OpenAI key from Brendan</a:t>
             </a:r>
           </a:p>
           <a:p>
